--- a/slides/release/02__module1.pptx
+++ b/slides/release/02__module1.pptx
@@ -3366,39 +3366,52 @@
           <a:lstStyle/>
           <a:p>
             <a:r>
+              <a:rPr dirty="0"/>
               <a:t> An</a:t>
             </a:r>
             <a:r>
-              <a:rPr b="1"/>
+              <a:rPr b="1" dirty="0"/>
               <a:t> embedding</a:t>
             </a:r>
             <a:r>
+              <a:rPr dirty="0"/>
               <a:t> is a vector representation of text that captures semantic meaning.</a:t>
             </a:r>
-          </a:p>
-          <a:p>
-            <a:endParaRPr/>
-          </a:p>
-          <a:p>
-            <a:endParaRPr/>
-          </a:p>
-          <a:p>
-            <a:r>
+            <a:endParaRPr lang="en-US" dirty="0"/>
+          </a:p>
+          <a:p>
+            <a:endParaRPr lang="en-US" dirty="0"/>
+          </a:p>
+          <a:p>
+            <a:endParaRPr dirty="0"/>
+          </a:p>
+          <a:p>
+            <a:endParaRPr dirty="0"/>
+          </a:p>
+          <a:p>
+            <a:endParaRPr dirty="0"/>
+          </a:p>
+          <a:p>
+            <a:r>
+              <a:rPr dirty="0"/>
               <a:t> Why this matters:</a:t>
             </a:r>
           </a:p>
           <a:p>
             <a:r>
+              <a:rPr dirty="0"/>
               <a:t> Semantic attacks bypass keyword filters</a:t>
             </a:r>
           </a:p>
           <a:p>
             <a:r>
+              <a:rPr dirty="0"/>
               <a:t> Poisoned documents can be designed to be retrieved for specific queries</a:t>
             </a:r>
           </a:p>
           <a:p>
             <a:r>
+              <a:rPr dirty="0"/>
               <a:t> Filtering by content requires ML classifiers, not regex</a:t>
             </a:r>
           </a:p>
@@ -3453,8 +3466,8 @@
         </p:blipFill>
         <p:spPr>
           <a:xfrm>
-            <a:off x="0" y="1792224"/>
-            <a:ext cx="9702800" cy="1054100"/>
+            <a:off x="28575" y="2359107"/>
+            <a:ext cx="9344025" cy="1015123"/>
           </a:xfrm>
           <a:prstGeom prst="rect">
             <a:avLst/>
@@ -3741,7 +3754,7 @@
         </p:blipFill>
         <p:spPr>
           <a:xfrm>
-            <a:off x="0" y="914400"/>
+            <a:off x="0" y="1227931"/>
             <a:ext cx="8940800" cy="2921000"/>
           </a:xfrm>
           <a:prstGeom prst="rect">
@@ -3811,32 +3824,46 @@
           <a:lstStyle/>
           <a:p>
             <a:r>
+              <a:rPr dirty="0"/>
               <a:t> LLMs request tools using structured output:</a:t>
             </a:r>
-          </a:p>
-          <a:p>
-            <a:endParaRPr/>
-          </a:p>
-          <a:p>
-            <a:endParaRPr/>
-          </a:p>
-          <a:p>
-            <a:endParaRPr/>
-          </a:p>
-          <a:p>
-            <a:r>
+            <a:endParaRPr lang="en-US" dirty="0"/>
+          </a:p>
+          <a:p>
+            <a:endParaRPr lang="en-US" dirty="0"/>
+          </a:p>
+          <a:p>
+            <a:endParaRPr lang="en-US" dirty="0"/>
+          </a:p>
+          <a:p>
+            <a:endParaRPr dirty="0"/>
+          </a:p>
+          <a:p>
+            <a:endParaRPr dirty="0"/>
+          </a:p>
+          <a:p>
+            <a:endParaRPr dirty="0"/>
+          </a:p>
+          <a:p>
+            <a:endParaRPr dirty="0"/>
+          </a:p>
+          <a:p>
+            <a:r>
+              <a:rPr dirty="0"/>
               <a:t> The application executes the tool and returns results to the model.</a:t>
             </a:r>
           </a:p>
           <a:p>
             <a:r>
+              <a:rPr dirty="0"/>
               <a:t> Security risk: An attacker who controls the prompt can influence</a:t>
             </a:r>
             <a:r>
-              <a:rPr b="1"/>
+              <a:rPr b="1" dirty="0"/>
               <a:t> which tools are called with what parameters</a:t>
             </a:r>
             <a:r>
+              <a:rPr dirty="0"/>
               <a:t> .</a:t>
             </a:r>
           </a:p>
@@ -3891,7 +3918,7 @@
         </p:blipFill>
         <p:spPr>
           <a:xfrm>
-            <a:off x="0" y="1353312"/>
+            <a:off x="0" y="1558131"/>
             <a:ext cx="5283200" cy="2387600"/>
           </a:xfrm>
           <a:prstGeom prst="rect">
@@ -4097,32 +4124,47 @@
           <a:lstStyle/>
           <a:p>
             <a:r>
+              <a:rPr dirty="0"/>
               <a:t> Modern AI systems often chain multiple agents:</a:t>
             </a:r>
-          </a:p>
-          <a:p>
-            <a:endParaRPr/>
-          </a:p>
-          <a:p>
-            <a:endParaRPr/>
-          </a:p>
-          <a:p>
-            <a:r>
+            <a:endParaRPr lang="en-US" dirty="0"/>
+          </a:p>
+          <a:p>
+            <a:endParaRPr lang="en-US" dirty="0"/>
+          </a:p>
+          <a:p>
+            <a:endParaRPr lang="en-US" dirty="0"/>
+          </a:p>
+          <a:p>
+            <a:endParaRPr dirty="0"/>
+          </a:p>
+          <a:p>
+            <a:endParaRPr dirty="0"/>
+          </a:p>
+          <a:p>
+            <a:endParaRPr dirty="0"/>
+          </a:p>
+          <a:p>
+            <a:r>
+              <a:rPr dirty="0"/>
               <a:t> Attack implications:</a:t>
             </a:r>
           </a:p>
           <a:p>
             <a:r>
+              <a:rPr dirty="0"/>
               <a:t> An attacker injecting into one agent can propagate to others</a:t>
             </a:r>
           </a:p>
           <a:p>
             <a:r>
+              <a:rPr dirty="0"/>
               <a:t> Agent-to-agent calls may bypass WAF entirely (internal network)</a:t>
             </a:r>
           </a:p>
           <a:p>
             <a:r>
+              <a:rPr dirty="0"/>
               <a:t> Trust boundaries between agents are often undefined</a:t>
             </a:r>
           </a:p>
@@ -4177,7 +4219,7 @@
         </p:blipFill>
         <p:spPr>
           <a:xfrm>
-            <a:off x="0" y="1353312"/>
+            <a:off x="0" y="1634331"/>
             <a:ext cx="4826000" cy="1587500"/>
           </a:xfrm>
           <a:prstGeom prst="rect">
@@ -4759,10 +4801,16 @@
           <p:cNvGraphicFramePr>
             <a:graphicFrameLocks noGrp="1"/>
           </p:cNvGraphicFramePr>
-          <p:nvPr/>
+          <p:nvPr>
+            <p:extLst>
+              <p:ext uri="{D42A27DB-BD31-4B8C-83A1-F6EECF244321}">
+                <p14:modId xmlns:p14="http://schemas.microsoft.com/office/powerpoint/2010/main" val="260385533"/>
+              </p:ext>
+            </p:extLst>
+          </p:nvPr>
         </p:nvGraphicFramePr>
         <p:xfrm>
-          <a:off x="237744" y="914400"/>
+          <a:off x="342900" y="1129133"/>
           <a:ext cx="8915400" cy="3657600"/>
         </p:xfrm>
         <a:graphic>
@@ -5016,6 +5064,7 @@
                     <a:lstStyle/>
                     <a:p>
                       <a:r>
+                        <a:rPr dirty="0"/>
                         <a:t>Semantic analysis</a:t>
                       </a:r>
                     </a:p>
@@ -5126,6 +5175,7 @@
                     <a:lstStyle/>
                     <a:p>
                       <a:r>
+                        <a:rPr dirty="0"/>
                         <a:t>✓</a:t>
                       </a:r>
                     </a:p>
@@ -5204,24 +5254,38 @@
           <a:lstStyle/>
           <a:p>
             <a:r>
-              <a:rPr b="1"/>
+              <a:rPr b="1" dirty="0"/>
               <a:t> MCP</a:t>
             </a:r>
             <a:r>
+              <a:rPr dirty="0"/>
               <a:t> (Anthropic, 2024) is an open protocol for connecting LLMs to external tools and data.</a:t>
             </a:r>
           </a:p>
           <a:p>
-            <a:endParaRPr/>
-          </a:p>
-          <a:p>
-            <a:endParaRPr/>
-          </a:p>
-          <a:p>
-            <a:endParaRPr/>
-          </a:p>
-          <a:p>
-            <a:r>
+            <a:endParaRPr lang="en-US" dirty="0"/>
+          </a:p>
+          <a:p>
+            <a:endParaRPr lang="en-US" dirty="0"/>
+          </a:p>
+          <a:p>
+            <a:endParaRPr lang="en-US" dirty="0"/>
+          </a:p>
+          <a:p>
+            <a:endParaRPr lang="en-US" dirty="0"/>
+          </a:p>
+          <a:p>
+            <a:endParaRPr dirty="0"/>
+          </a:p>
+          <a:p>
+            <a:endParaRPr dirty="0"/>
+          </a:p>
+          <a:p>
+            <a:endParaRPr dirty="0"/>
+          </a:p>
+          <a:p>
+            <a:r>
+              <a:rPr dirty="0"/>
               <a:t> MCP is becoming the standard for agent tool connectivity — analogous to USB for peripherals.</a:t>
             </a:r>
           </a:p>
@@ -5276,7 +5340,7 @@
         </p:blipFill>
         <p:spPr>
           <a:xfrm>
-            <a:off x="0" y="1792224"/>
+            <a:off x="0" y="2167731"/>
             <a:ext cx="7721600" cy="2120900"/>
           </a:xfrm>
           <a:prstGeom prst="rect">
@@ -5562,10 +5626,16 @@
           <p:cNvGraphicFramePr>
             <a:graphicFrameLocks noGrp="1"/>
           </p:cNvGraphicFramePr>
-          <p:nvPr/>
+          <p:nvPr>
+            <p:extLst>
+              <p:ext uri="{D42A27DB-BD31-4B8C-83A1-F6EECF244321}">
+                <p14:modId xmlns:p14="http://schemas.microsoft.com/office/powerpoint/2010/main" val="2469039498"/>
+              </p:ext>
+            </p:extLst>
+          </p:nvPr>
         </p:nvGraphicFramePr>
         <p:xfrm>
-          <a:off x="237744" y="914400"/>
+          <a:off x="234950" y="1114845"/>
           <a:ext cx="8915400" cy="2743200"/>
         </p:xfrm>
         <a:graphic>
@@ -5843,6 +5913,7 @@
                     <a:lstStyle/>
                     <a:p>
                       <a:r>
+                        <a:rPr dirty="0"/>
                         <a:t>Internal</a:t>
                       </a:r>
                     </a:p>
@@ -6287,8 +6358,8 @@
         </p:blipFill>
         <p:spPr>
           <a:xfrm>
-            <a:off x="0" y="914400"/>
-            <a:ext cx="9855200" cy="2387600"/>
+            <a:off x="-14288" y="1519187"/>
+            <a:ext cx="9386888" cy="2274143"/>
           </a:xfrm>
           <a:prstGeom prst="rect">
             <a:avLst/>
@@ -8641,48 +8712,61 @@
           <a:lstStyle/>
           <a:p>
             <a:r>
+              <a:rPr dirty="0"/>
               <a:t> A prompt typically has three parts:</a:t>
             </a:r>
           </a:p>
           <a:p>
             <a:r>
-              <a:rPr b="1"/>
+              <a:rPr b="1" dirty="0"/>
               <a:t> System prompt</a:t>
             </a:r>
             <a:r>
+              <a:rPr dirty="0"/>
               <a:t> — instructions set by the developer</a:t>
             </a:r>
-          </a:p>
-          <a:p>
-            <a:endParaRPr/>
-          </a:p>
-          <a:p>
-            <a:r>
-              <a:rPr b="1"/>
+            <a:endParaRPr lang="en-US" dirty="0"/>
+          </a:p>
+          <a:p>
+            <a:endParaRPr lang="en-US" dirty="0"/>
+          </a:p>
+          <a:p>
+            <a:endParaRPr dirty="0"/>
+          </a:p>
+          <a:p>
+            <a:endParaRPr dirty="0"/>
+          </a:p>
+          <a:p>
+            <a:r>
+              <a:rPr b="1" dirty="0"/>
               <a:t> Context</a:t>
             </a:r>
             <a:r>
+              <a:rPr dirty="0"/>
               <a:t> — retrieved documents, history, tool output</a:t>
             </a:r>
           </a:p>
           <a:p>
             <a:r>
-              <a:rPr b="1"/>
+              <a:rPr b="1" dirty="0"/>
               <a:t> User message</a:t>
             </a:r>
             <a:r>
+              <a:rPr dirty="0"/>
               <a:t> — what the end user typed</a:t>
             </a:r>
           </a:p>
           <a:p>
             <a:r>
+              <a:rPr dirty="0"/>
               <a:t> Together these form the</a:t>
             </a:r>
             <a:r>
-              <a:rPr b="1"/>
+              <a:rPr b="1" dirty="0"/>
               <a:t> full context window</a:t>
             </a:r>
             <a:r>
+              <a:rPr dirty="0"/>
               <a:t> sent to the model.</a:t>
             </a:r>
           </a:p>
@@ -8737,7 +8821,7 @@
         </p:blipFill>
         <p:spPr>
           <a:xfrm>
-            <a:off x="0" y="1792224"/>
+            <a:off x="44450" y="2091531"/>
             <a:ext cx="9093200" cy="787400"/>
           </a:xfrm>
           <a:prstGeom prst="rect">
@@ -8949,26 +9033,22 @@
           <a:bodyPr/>
           <a:lstStyle/>
           <a:p>
-            <a:endParaRPr/>
-          </a:p>
-          <a:p>
-            <a:endParaRPr/>
-          </a:p>
-          <a:p>
-            <a:endParaRPr/>
-          </a:p>
-          <a:p>
-            <a:endParaRPr/>
-          </a:p>
-          <a:p>
-            <a:r>
-              <a:t> WAF sees HTTP traffic. It does</a:t>
-            </a:r>
-            <a:r>
-              <a:rPr b="1"/>
+            <a:pPr marL="0" indent="0">
+              <a:buNone/>
+            </a:pPr>
+            <a:endParaRPr lang="en-US" dirty="0"/>
+          </a:p>
+          <a:p>
+            <a:r>
+              <a:rPr dirty="0"/>
+              <a:t>WAF sees HTTP traffic. It does</a:t>
+            </a:r>
+            <a:r>
+              <a:rPr b="1" dirty="0"/>
               <a:t> not</a:t>
             </a:r>
             <a:r>
+              <a:rPr dirty="0"/>
               <a:t> see what the LLM receives internally.</a:t>
             </a:r>
           </a:p>
@@ -9023,7 +9103,7 @@
         </p:blipFill>
         <p:spPr>
           <a:xfrm>
-            <a:off x="0" y="914400"/>
+            <a:off x="225425" y="2555081"/>
             <a:ext cx="8483600" cy="3187700"/>
           </a:xfrm>
           <a:prstGeom prst="rect">
